--- a/Rikets tilstand 2026.pptx
+++ b/Rikets tilstand 2026.pptx
@@ -30684,7 +30684,7 @@
               </a:spcAft>
             </a:pPr>
             <a:r>
-              <a:rPr sz="6000" b="1" spc="-192">
+              <a:rPr sz="6000" b="1" spc="-192" dirty="0" err="1">
                 <a:solidFill>
                   <a:srgbClr val="F3F0E2">
                     <a:alpha val="66000"/>
@@ -30693,7 +30693,19 @@
                 <a:latin typeface="Lexend"/>
                 <a:cs typeface="Lexend"/>
               </a:rPr>
-              <a:t>utfordringer.</a:t>
+              <a:t>utfordringer</a:t>
+            </a:r>
+            <a:r>
+              <a:rPr sz="6000" b="1" spc="-192" dirty="0">
+                <a:solidFill>
+                  <a:srgbClr val="F3F0E2">
+                    <a:alpha val="66000"/>
+                  </a:srgbClr>
+                </a:solidFill>
+                <a:latin typeface="Lexend"/>
+                <a:cs typeface="Lexend"/>
+              </a:rPr>
+              <a:t>.</a:t>
             </a:r>
           </a:p>
         </p:txBody>
